--- a/classes/parte-18-ia-aplicada-a-la-ciberseguridad/339-riesgos-guardrails-opsec-y-etica-del-hacking-con-ia/clase-339-presentacion.pptx
+++ b/classes/parte-18-ia-aplicada-a-la-ciberseguridad/339-riesgos-guardrails-opsec-y-etica-del-hacking-con-ia/clase-339-presentacion.pptx
@@ -17,6 +17,10 @@
     <p:sldId id="265" r:id="rId16"/>
     <p:sldId id="266" r:id="rId17"/>
     <p:sldId id="267" r:id="rId18"/>
+    <p:sldId id="268" r:id="rId19"/>
+    <p:sldId id="269" r:id="rId20"/>
+    <p:sldId id="270" r:id="rId21"/>
+    <p:sldId id="271" r:id="rId22"/>
   </p:sldIdLst>
   <p:sldSz cx="9144000" cy="6858000" type="screen4x3"/>
   <p:notesSz cx="6858000" cy="9144000"/>
@@ -3198,7 +3202,7 @@
                   <a:srgbClr val="0B3D2E"/>
                 </a:solidFill>
               </a:rPr>
-              <a:t>⚠️ Errores comunes</a:t>
+              <a:t>🧪 Laboratorio guiado (diseño de guardrails)</a:t>
             </a:r>
           </a:p>
         </p:txBody>
@@ -3236,67 +3240,82 @@
                   <a:srgbClr val="22282E"/>
                 </a:solidFill>
               </a:rPr>
-              <a:t>•  El agente obedece instrucciones de una web/banner — Prompt injection. Trata los datos del objetivo como no confiables y no le des autonomía total.</a:t>
-            </a:r>
-          </a:p>
-          <a:p>
-            <a:pPr>
-              <a:spcAft>
-                <a:spcPts val="600"/>
-              </a:spcAft>
-            </a:pPr>
-            <a:r>
-              <a:rPr sz="1500">
-                <a:solidFill>
-                  <a:srgbClr val="22282E"/>
-                </a:solidFill>
-              </a:rPr>
-              <a:t>•  Credenciales en el contexto del agente — Fuga potencial. Usa secretos gestionados, nunca en el prompt.</a:t>
-            </a:r>
-          </a:p>
-          <a:p>
-            <a:pPr>
-              <a:spcAft>
-                <a:spcPts val="600"/>
-              </a:spcAft>
-            </a:pPr>
-            <a:r>
-              <a:rPr sz="1500">
-                <a:solidFill>
-                  <a:srgbClr val="22282E"/>
-                </a:solidFill>
-              </a:rPr>
-              <a:t>•  Sin registro de lo que hizo el agente — No hay auditoría ni defensa legal. Loguea cada acción.</a:t>
-            </a:r>
-          </a:p>
-          <a:p>
-            <a:pPr>
-              <a:spcAft>
-                <a:spcPts val="600"/>
-              </a:spcAft>
-            </a:pPr>
-            <a:r>
-              <a:rPr sz="1500">
-                <a:solidFill>
-                  <a:srgbClr val="22282E"/>
-                </a:solidFill>
-              </a:rPr>
-              <a:t>•  "La IA lo hizo, no yo" — La responsabilidad es del operador humano. La IA no exime de nada.</a:t>
-            </a:r>
-          </a:p>
-          <a:p>
-            <a:pPr>
-              <a:spcAft>
-                <a:spcPts val="600"/>
-              </a:spcAft>
-            </a:pPr>
-            <a:r>
-              <a:rPr sz="1500">
-                <a:solidFill>
-                  <a:srgbClr val="22282E"/>
-                </a:solidFill>
-              </a:rPr>
-              <a:t>•  Datos de cliente enviados a un modelo público — Posible incumplimiento legal. Modelo aprobado/local y anonimización.</a:t>
+              <a:t>•  Modelo de amenazas del agente. Enumera cómo podrían atacar tu agente (inyección desde un banner, fuga de credenciales del contexto, acción fuera de alcance).</a:t>
+            </a:r>
+          </a:p>
+          <a:p>
+            <a:pPr>
+              <a:spcAft>
+                <a:spcPts val="600"/>
+              </a:spcAft>
+            </a:pPr>
+            <a:r>
+              <a:rPr sz="1500">
+                <a:solidFill>
+                  <a:srgbClr val="22282E"/>
+                </a:solidFill>
+              </a:rPr>
+              <a:t>•  Matriz de permisos. Clasifica sus herramientas en auto / aprobación / prohibido y justifica.</a:t>
+            </a:r>
+          </a:p>
+          <a:p>
+            <a:pPr>
+              <a:spcAft>
+                <a:spcPts val="600"/>
+              </a:spcAft>
+            </a:pPr>
+            <a:r>
+              <a:rPr sz="1500">
+                <a:solidFill>
+                  <a:srgbClr val="22282E"/>
+                </a:solidFill>
+              </a:rPr>
+              <a:t>•  Aislamiento. Define la red y los datos a los que el agente no debe acceder.</a:t>
+            </a:r>
+          </a:p>
+          <a:p>
+            <a:pPr>
+              <a:spcAft>
+                <a:spcPts val="600"/>
+              </a:spcAft>
+            </a:pPr>
+            <a:r>
+              <a:rPr sz="1500">
+                <a:solidFill>
+                  <a:srgbClr val="22282E"/>
+                </a:solidFill>
+              </a:rPr>
+              <a:t>•  Registro. Diseña el log de auditoría: qué campos guardas por cada acción.</a:t>
+            </a:r>
+          </a:p>
+          <a:p>
+            <a:pPr>
+              <a:spcAft>
+                <a:spcPts val="600"/>
+              </a:spcAft>
+            </a:pPr>
+            <a:r>
+              <a:rPr sz="1500">
+                <a:solidFill>
+                  <a:srgbClr val="22282E"/>
+                </a:solidFill>
+              </a:rPr>
+              <a:t>•  Política de datos. Escribe qué datos jamás entran a un modelo externo y por qué.</a:t>
+            </a:r>
+          </a:p>
+          <a:p>
+            <a:pPr>
+              <a:spcAft>
+                <a:spcPts val="600"/>
+              </a:spcAft>
+            </a:pPr>
+            <a:r>
+              <a:rPr sz="1500">
+                <a:solidFill>
+                  <a:srgbClr val="22282E"/>
+                </a:solidFill>
+              </a:rPr>
+              <a:t>•  Checklist legal. Redacta el mínimo legal antes de una sesión (autorización, alcance, ventana).</a:t>
             </a:r>
           </a:p>
         </p:txBody>
@@ -3347,7 +3366,7 @@
                   <a:srgbClr val="0B3D2E"/>
                 </a:solidFill>
               </a:rPr>
-              <a:t>❓ Preguntas frecuentes</a:t>
+              <a:t>✍️ Ejercicios</a:t>
             </a:r>
           </a:p>
         </p:txBody>
@@ -3385,97 +3404,67 @@
                   <a:srgbClr val="22282E"/>
                 </a:solidFill>
               </a:rPr>
-              <a:t>•  ❓ ¿La IA me hace responsable de menos?</a:t>
-            </a:r>
-          </a:p>
-          <a:p>
-            <a:pPr>
-              <a:spcAft>
-                <a:spcPts val="600"/>
-              </a:spcAft>
-            </a:pPr>
-            <a:r>
-              <a:rPr sz="1500">
-                <a:solidFill>
-                  <a:srgbClr val="22282E"/>
-                </a:solidFill>
-              </a:rPr>
-              <a:t>•  No. Eres tan responsable como si hubieras ejecutado las acciones a mano. La autorización, el</a:t>
-            </a:r>
-          </a:p>
-          <a:p>
-            <a:pPr>
-              <a:spcAft>
-                <a:spcPts val="600"/>
-              </a:spcAft>
-            </a:pPr>
-            <a:r>
-              <a:rPr sz="1500">
-                <a:solidFill>
-                  <a:srgbClr val="22282E"/>
-                </a:solidFill>
-              </a:rPr>
-              <a:t>•  alcance y las consecuencias son tuyos.</a:t>
-            </a:r>
-          </a:p>
-          <a:p>
-            <a:pPr>
-              <a:spcAft>
-                <a:spcPts val="600"/>
-              </a:spcAft>
-            </a:pPr>
-            <a:r>
-              <a:rPr sz="1500">
-                <a:solidFill>
-                  <a:srgbClr val="22282E"/>
-                </a:solidFill>
-              </a:rPr>
-              <a:t>•  ❓ ¿Puede mi propio agente volverse en mi contra?</a:t>
-            </a:r>
-          </a:p>
-          <a:p>
-            <a:pPr>
-              <a:spcAft>
-                <a:spcPts val="600"/>
-              </a:spcAft>
-            </a:pPr>
-            <a:r>
-              <a:rPr sz="1500">
-                <a:solidFill>
-                  <a:srgbClr val="22282E"/>
-                </a:solidFill>
-              </a:rPr>
-              <a:t>•  Sí, vía prompt injection: contenido malicioso en los datos que procesa puede intentar</a:t>
-            </a:r>
-          </a:p>
-          <a:p>
-            <a:pPr>
-              <a:spcAft>
-                <a:spcPts val="600"/>
-              </a:spcAft>
-            </a:pPr>
-            <a:r>
-              <a:rPr sz="1500">
-                <a:solidFill>
-                  <a:srgbClr val="22282E"/>
-                </a:solidFill>
-              </a:rPr>
-              <a:t>•  manipularlo. Por eso: mínimo privilegio, aprobación humana y aislamiento.</a:t>
-            </a:r>
-          </a:p>
-          <a:p>
-            <a:pPr>
-              <a:spcAft>
-                <a:spcPts val="600"/>
-              </a:spcAft>
-            </a:pPr>
-            <a:r>
-              <a:rPr sz="1500">
-                <a:solidFill>
-                  <a:srgbClr val="22282E"/>
-                </a:solidFill>
-              </a:rPr>
-              <a:t>•  ❓ ¿Modelo local o en la nube?</a:t>
+              <a:t>•  Da un ejemplo concreto de prompt injection contra un agente de pentest y su mitigación.</a:t>
+            </a:r>
+          </a:p>
+          <a:p>
+            <a:pPr>
+              <a:spcAft>
+                <a:spcPts val="600"/>
+              </a:spcAft>
+            </a:pPr>
+            <a:r>
+              <a:rPr sz="1500">
+                <a:solidFill>
+                  <a:srgbClr val="22282E"/>
+                </a:solidFill>
+              </a:rPr>
+              <a:t>•  ¿Qué es exceso de agencia y cómo lo limitas?</a:t>
+            </a:r>
+          </a:p>
+          <a:p>
+            <a:pPr>
+              <a:spcAft>
+                <a:spcPts val="600"/>
+              </a:spcAft>
+            </a:pPr>
+            <a:r>
+              <a:rPr sz="1500">
+                <a:solidFill>
+                  <a:srgbClr val="22282E"/>
+                </a:solidFill>
+              </a:rPr>
+              <a:t>•  Diseña 3 campos imprescindibles de un log de auditoría del agente.</a:t>
+            </a:r>
+          </a:p>
+          <a:p>
+            <a:pPr>
+              <a:spcAft>
+                <a:spcPts val="600"/>
+              </a:spcAft>
+            </a:pPr>
+            <a:r>
+              <a:rPr sz="1500">
+                <a:solidFill>
+                  <a:srgbClr val="22282E"/>
+                </a:solidFill>
+              </a:rPr>
+              <a:t>•  ¿Cuándo usarías un modelo local en vez de uno en la nube?</a:t>
+            </a:r>
+          </a:p>
+          <a:p>
+            <a:pPr>
+              <a:spcAft>
+                <a:spcPts val="600"/>
+              </a:spcAft>
+            </a:pPr>
+            <a:r>
+              <a:rPr sz="1500">
+                <a:solidFill>
+                  <a:srgbClr val="22282E"/>
+                </a:solidFill>
+              </a:rPr>
+              <a:t>•  Explica por qué la IA no reduce tu responsabilidad legal.</a:t>
             </a:r>
           </a:p>
         </p:txBody>
@@ -3526,7 +3515,7 @@
                   <a:srgbClr val="0B3D2E"/>
                 </a:solidFill>
               </a:rPr>
-              <a:t>🔗 Referencias</a:t>
+              <a:t>📝 Reto verificable</a:t>
             </a:r>
           </a:p>
         </p:txBody>
@@ -3564,6 +3553,483 @@
                   <a:srgbClr val="22282E"/>
                 </a:solidFill>
               </a:rPr>
+              <a:t>•  Redacta un documento de guardrails para operar un agente de seguridad: matriz de permisos,</a:t>
+            </a:r>
+          </a:p>
+          <a:p>
+            <a:pPr>
+              <a:spcAft>
+                <a:spcPts val="600"/>
+              </a:spcAft>
+            </a:pPr>
+            <a:r>
+              <a:rPr sz="1500">
+                <a:solidFill>
+                  <a:srgbClr val="22282E"/>
+                </a:solidFill>
+              </a:rPr>
+              <a:t>•  aislamiento, política de datos, registro de auditoría y checklist legal.</a:t>
+            </a:r>
+          </a:p>
+          <a:p>
+            <a:pPr>
+              <a:spcAft>
+                <a:spcPts val="600"/>
+              </a:spcAft>
+            </a:pPr>
+            <a:r>
+              <a:rPr sz="1500">
+                <a:solidFill>
+                  <a:srgbClr val="22282E"/>
+                </a:solidFill>
+              </a:rPr>
+              <a:t>•  Criterio de aceptación: toda acción con impacto requiere aprobación humana; hay aislamiento</a:t>
+            </a:r>
+          </a:p>
+          <a:p>
+            <a:pPr>
+              <a:spcAft>
+                <a:spcPts val="600"/>
+              </a:spcAft>
+            </a:pPr>
+            <a:r>
+              <a:rPr sz="1500">
+                <a:solidFill>
+                  <a:srgbClr val="22282E"/>
+                </a:solidFill>
+              </a:rPr>
+              <a:t>•  de red; se define qué datos no salen al modelo; existe un registro auditable; se exige</a:t>
+            </a:r>
+          </a:p>
+          <a:p>
+            <a:pPr>
+              <a:spcAft>
+                <a:spcPts val="600"/>
+              </a:spcAft>
+            </a:pPr>
+            <a:r>
+              <a:rPr sz="1500">
+                <a:solidFill>
+                  <a:srgbClr val="22282E"/>
+                </a:solidFill>
+              </a:rPr>
+              <a:t>•  autorización por escrito antes de cualquier sesión.</a:t>
+            </a:r>
+          </a:p>
+        </p:txBody>
+      </p:sp>
+    </p:spTree>
+  </p:cSld>
+  <p:clrMapOvr>
+    <a:masterClrMapping/>
+  </p:clrMapOvr>
+</p:sld>
+</file>
+
+<file path=ppt/slides/slide13.xml><?xml version="1.0" encoding="utf-8"?>
+<p:sld xmlns:a="http://schemas.openxmlformats.org/drawingml/2006/main" xmlns:p="http://schemas.openxmlformats.org/presentationml/2006/main" xmlns:r="http://schemas.openxmlformats.org/officeDocument/2006/relationships">
+  <p:cSld>
+    <p:spTree>
+      <p:nvGrpSpPr>
+        <p:cNvPr id="1" name=""/>
+        <p:cNvGrpSpPr/>
+        <p:nvPr/>
+      </p:nvGrpSpPr>
+      <p:grpSpPr/>
+      <p:sp>
+        <p:nvSpPr>
+          <p:cNvPr id="2" name="TextBox 1"/>
+          <p:cNvSpPr txBox="1"/>
+          <p:nvPr/>
+        </p:nvSpPr>
+        <p:spPr>
+          <a:xfrm>
+            <a:off x="457200" y="320040"/>
+            <a:ext cx="8229600" cy="822960"/>
+          </a:xfrm>
+          <a:prstGeom prst="rect">
+            <a:avLst/>
+          </a:prstGeom>
+          <a:noFill/>
+        </p:spPr>
+        <p:txBody>
+          <a:bodyPr wrap="square">
+            <a:spAutoFit/>
+          </a:bodyPr>
+          <a:lstStyle/>
+          <a:p>
+            <a:r>
+              <a:rPr sz="2600" b="1">
+                <a:solidFill>
+                  <a:srgbClr val="0B3D2E"/>
+                </a:solidFill>
+              </a:rPr>
+              <a:t>⚠️ Errores comunes</a:t>
+            </a:r>
+          </a:p>
+        </p:txBody>
+      </p:sp>
+      <p:sp>
+        <p:nvSpPr>
+          <p:cNvPr id="3" name="TextBox 2"/>
+          <p:cNvSpPr txBox="1"/>
+          <p:nvPr/>
+        </p:nvSpPr>
+        <p:spPr>
+          <a:xfrm>
+            <a:off x="457200" y="1280160"/>
+            <a:ext cx="8229600" cy="4937760"/>
+          </a:xfrm>
+          <a:prstGeom prst="rect">
+            <a:avLst/>
+          </a:prstGeom>
+          <a:noFill/>
+        </p:spPr>
+        <p:txBody>
+          <a:bodyPr wrap="square">
+            <a:spAutoFit/>
+          </a:bodyPr>
+          <a:lstStyle/>
+          <a:p>
+            <a:pPr>
+              <a:spcAft>
+                <a:spcPts val="600"/>
+              </a:spcAft>
+            </a:pPr>
+            <a:r>
+              <a:rPr sz="1500">
+                <a:solidFill>
+                  <a:srgbClr val="22282E"/>
+                </a:solidFill>
+              </a:rPr>
+              <a:t>•  El agente obedece instrucciones de una web/banner — Prompt injection. Trata los datos del objetivo como no confiables y no le des autonomía total.</a:t>
+            </a:r>
+          </a:p>
+          <a:p>
+            <a:pPr>
+              <a:spcAft>
+                <a:spcPts val="600"/>
+              </a:spcAft>
+            </a:pPr>
+            <a:r>
+              <a:rPr sz="1500">
+                <a:solidFill>
+                  <a:srgbClr val="22282E"/>
+                </a:solidFill>
+              </a:rPr>
+              <a:t>•  Credenciales en el contexto del agente — Fuga potencial. Usa secretos gestionados, nunca en el prompt.</a:t>
+            </a:r>
+          </a:p>
+          <a:p>
+            <a:pPr>
+              <a:spcAft>
+                <a:spcPts val="600"/>
+              </a:spcAft>
+            </a:pPr>
+            <a:r>
+              <a:rPr sz="1500">
+                <a:solidFill>
+                  <a:srgbClr val="22282E"/>
+                </a:solidFill>
+              </a:rPr>
+              <a:t>•  Sin registro de lo que hizo el agente — No hay auditoría ni defensa legal. Loguea cada acción.</a:t>
+            </a:r>
+          </a:p>
+          <a:p>
+            <a:pPr>
+              <a:spcAft>
+                <a:spcPts val="600"/>
+              </a:spcAft>
+            </a:pPr>
+            <a:r>
+              <a:rPr sz="1500">
+                <a:solidFill>
+                  <a:srgbClr val="22282E"/>
+                </a:solidFill>
+              </a:rPr>
+              <a:t>•  "La IA lo hizo, no yo" — La responsabilidad es del operador humano. La IA no exime de nada.</a:t>
+            </a:r>
+          </a:p>
+          <a:p>
+            <a:pPr>
+              <a:spcAft>
+                <a:spcPts val="600"/>
+              </a:spcAft>
+            </a:pPr>
+            <a:r>
+              <a:rPr sz="1500">
+                <a:solidFill>
+                  <a:srgbClr val="22282E"/>
+                </a:solidFill>
+              </a:rPr>
+              <a:t>•  Datos de cliente enviados a un modelo público — Posible incumplimiento legal. Modelo aprobado/local y anonimización.</a:t>
+            </a:r>
+          </a:p>
+        </p:txBody>
+      </p:sp>
+    </p:spTree>
+  </p:cSld>
+  <p:clrMapOvr>
+    <a:masterClrMapping/>
+  </p:clrMapOvr>
+</p:sld>
+</file>
+
+<file path=ppt/slides/slide14.xml><?xml version="1.0" encoding="utf-8"?>
+<p:sld xmlns:a="http://schemas.openxmlformats.org/drawingml/2006/main" xmlns:p="http://schemas.openxmlformats.org/presentationml/2006/main" xmlns:r="http://schemas.openxmlformats.org/officeDocument/2006/relationships">
+  <p:cSld>
+    <p:spTree>
+      <p:nvGrpSpPr>
+        <p:cNvPr id="1" name=""/>
+        <p:cNvGrpSpPr/>
+        <p:nvPr/>
+      </p:nvGrpSpPr>
+      <p:grpSpPr/>
+      <p:sp>
+        <p:nvSpPr>
+          <p:cNvPr id="2" name="TextBox 1"/>
+          <p:cNvSpPr txBox="1"/>
+          <p:nvPr/>
+        </p:nvSpPr>
+        <p:spPr>
+          <a:xfrm>
+            <a:off x="457200" y="320040"/>
+            <a:ext cx="8229600" cy="822960"/>
+          </a:xfrm>
+          <a:prstGeom prst="rect">
+            <a:avLst/>
+          </a:prstGeom>
+          <a:noFill/>
+        </p:spPr>
+        <p:txBody>
+          <a:bodyPr wrap="square">
+            <a:spAutoFit/>
+          </a:bodyPr>
+          <a:lstStyle/>
+          <a:p>
+            <a:r>
+              <a:rPr sz="2600" b="1">
+                <a:solidFill>
+                  <a:srgbClr val="0B3D2E"/>
+                </a:solidFill>
+              </a:rPr>
+              <a:t>❓ Preguntas frecuentes</a:t>
+            </a:r>
+          </a:p>
+        </p:txBody>
+      </p:sp>
+      <p:sp>
+        <p:nvSpPr>
+          <p:cNvPr id="3" name="TextBox 2"/>
+          <p:cNvSpPr txBox="1"/>
+          <p:nvPr/>
+        </p:nvSpPr>
+        <p:spPr>
+          <a:xfrm>
+            <a:off x="457200" y="1280160"/>
+            <a:ext cx="8229600" cy="4937760"/>
+          </a:xfrm>
+          <a:prstGeom prst="rect">
+            <a:avLst/>
+          </a:prstGeom>
+          <a:noFill/>
+        </p:spPr>
+        <p:txBody>
+          <a:bodyPr wrap="square">
+            <a:spAutoFit/>
+          </a:bodyPr>
+          <a:lstStyle/>
+          <a:p>
+            <a:pPr>
+              <a:spcAft>
+                <a:spcPts val="600"/>
+              </a:spcAft>
+            </a:pPr>
+            <a:r>
+              <a:rPr sz="1500">
+                <a:solidFill>
+                  <a:srgbClr val="22282E"/>
+                </a:solidFill>
+              </a:rPr>
+              <a:t>•  ❓ ¿La IA me hace responsable de menos?</a:t>
+            </a:r>
+          </a:p>
+          <a:p>
+            <a:pPr>
+              <a:spcAft>
+                <a:spcPts val="600"/>
+              </a:spcAft>
+            </a:pPr>
+            <a:r>
+              <a:rPr sz="1500">
+                <a:solidFill>
+                  <a:srgbClr val="22282E"/>
+                </a:solidFill>
+              </a:rPr>
+              <a:t>•  No. Eres tan responsable como si hubieras ejecutado las acciones a mano. La autorización, el</a:t>
+            </a:r>
+          </a:p>
+          <a:p>
+            <a:pPr>
+              <a:spcAft>
+                <a:spcPts val="600"/>
+              </a:spcAft>
+            </a:pPr>
+            <a:r>
+              <a:rPr sz="1500">
+                <a:solidFill>
+                  <a:srgbClr val="22282E"/>
+                </a:solidFill>
+              </a:rPr>
+              <a:t>•  alcance y las consecuencias son tuyos.</a:t>
+            </a:r>
+          </a:p>
+          <a:p>
+            <a:pPr>
+              <a:spcAft>
+                <a:spcPts val="600"/>
+              </a:spcAft>
+            </a:pPr>
+            <a:r>
+              <a:rPr sz="1500">
+                <a:solidFill>
+                  <a:srgbClr val="22282E"/>
+                </a:solidFill>
+              </a:rPr>
+              <a:t>•  ❓ ¿Puede mi propio agente volverse en mi contra?</a:t>
+            </a:r>
+          </a:p>
+          <a:p>
+            <a:pPr>
+              <a:spcAft>
+                <a:spcPts val="600"/>
+              </a:spcAft>
+            </a:pPr>
+            <a:r>
+              <a:rPr sz="1500">
+                <a:solidFill>
+                  <a:srgbClr val="22282E"/>
+                </a:solidFill>
+              </a:rPr>
+              <a:t>•  Sí, vía prompt injection: contenido malicioso en los datos que procesa puede intentar</a:t>
+            </a:r>
+          </a:p>
+          <a:p>
+            <a:pPr>
+              <a:spcAft>
+                <a:spcPts val="600"/>
+              </a:spcAft>
+            </a:pPr>
+            <a:r>
+              <a:rPr sz="1500">
+                <a:solidFill>
+                  <a:srgbClr val="22282E"/>
+                </a:solidFill>
+              </a:rPr>
+              <a:t>•  manipularlo. Por eso: mínimo privilegio, aprobación humana y aislamiento.</a:t>
+            </a:r>
+          </a:p>
+          <a:p>
+            <a:pPr>
+              <a:spcAft>
+                <a:spcPts val="600"/>
+              </a:spcAft>
+            </a:pPr>
+            <a:r>
+              <a:rPr sz="1500">
+                <a:solidFill>
+                  <a:srgbClr val="22282E"/>
+                </a:solidFill>
+              </a:rPr>
+              <a:t>•  ❓ ¿Modelo local o en la nube?</a:t>
+            </a:r>
+          </a:p>
+        </p:txBody>
+      </p:sp>
+    </p:spTree>
+  </p:cSld>
+  <p:clrMapOvr>
+    <a:masterClrMapping/>
+  </p:clrMapOvr>
+</p:sld>
+</file>
+
+<file path=ppt/slides/slide15.xml><?xml version="1.0" encoding="utf-8"?>
+<p:sld xmlns:a="http://schemas.openxmlformats.org/drawingml/2006/main" xmlns:p="http://schemas.openxmlformats.org/presentationml/2006/main" xmlns:r="http://schemas.openxmlformats.org/officeDocument/2006/relationships">
+  <p:cSld>
+    <p:spTree>
+      <p:nvGrpSpPr>
+        <p:cNvPr id="1" name=""/>
+        <p:cNvGrpSpPr/>
+        <p:nvPr/>
+      </p:nvGrpSpPr>
+      <p:grpSpPr/>
+      <p:sp>
+        <p:nvSpPr>
+          <p:cNvPr id="2" name="TextBox 1"/>
+          <p:cNvSpPr txBox="1"/>
+          <p:nvPr/>
+        </p:nvSpPr>
+        <p:spPr>
+          <a:xfrm>
+            <a:off x="457200" y="320040"/>
+            <a:ext cx="8229600" cy="822960"/>
+          </a:xfrm>
+          <a:prstGeom prst="rect">
+            <a:avLst/>
+          </a:prstGeom>
+          <a:noFill/>
+        </p:spPr>
+        <p:txBody>
+          <a:bodyPr wrap="square">
+            <a:spAutoFit/>
+          </a:bodyPr>
+          <a:lstStyle/>
+          <a:p>
+            <a:r>
+              <a:rPr sz="2600" b="1">
+                <a:solidFill>
+                  <a:srgbClr val="0B3D2E"/>
+                </a:solidFill>
+              </a:rPr>
+              <a:t>🔗 Referencias</a:t>
+            </a:r>
+          </a:p>
+        </p:txBody>
+      </p:sp>
+      <p:sp>
+        <p:nvSpPr>
+          <p:cNvPr id="3" name="TextBox 2"/>
+          <p:cNvSpPr txBox="1"/>
+          <p:nvPr/>
+        </p:nvSpPr>
+        <p:spPr>
+          <a:xfrm>
+            <a:off x="457200" y="1280160"/>
+            <a:ext cx="8229600" cy="4937760"/>
+          </a:xfrm>
+          <a:prstGeom prst="rect">
+            <a:avLst/>
+          </a:prstGeom>
+          <a:noFill/>
+        </p:spPr>
+        <p:txBody>
+          <a:bodyPr wrap="square">
+            <a:spAutoFit/>
+          </a:bodyPr>
+          <a:lstStyle/>
+          <a:p>
+            <a:pPr>
+              <a:spcAft>
+                <a:spcPts val="600"/>
+              </a:spcAft>
+            </a:pPr>
+            <a:r>
+              <a:rPr sz="1500">
+                <a:solidFill>
+                  <a:srgbClr val="22282E"/>
+                </a:solidFill>
+              </a:rPr>
               <a:t>•  OWASP Top 10 for LLM Applications — LLM01, LLM06.</a:t>
             </a:r>
           </a:p>
@@ -3599,6 +4065,81 @@
           </a:p>
         </p:txBody>
       </p:sp>
+    </p:spTree>
+  </p:cSld>
+  <p:clrMapOvr>
+    <a:masterClrMapping/>
+  </p:clrMapOvr>
+</p:sld>
+</file>
+
+<file path=ppt/slides/slide16.xml><?xml version="1.0" encoding="utf-8"?>
+<p:sld xmlns:a="http://schemas.openxmlformats.org/drawingml/2006/main" xmlns:p="http://schemas.openxmlformats.org/presentationml/2006/main" xmlns:r="http://schemas.openxmlformats.org/officeDocument/2006/relationships">
+  <p:cSld>
+    <p:spTree>
+      <p:nvGrpSpPr>
+        <p:cNvPr id="1" name=""/>
+        <p:cNvGrpSpPr/>
+        <p:nvPr/>
+      </p:nvGrpSpPr>
+      <p:grpSpPr/>
+      <p:sp>
+        <p:nvSpPr>
+          <p:cNvPr id="2" name="TextBox 1"/>
+          <p:cNvSpPr txBox="1"/>
+          <p:nvPr/>
+        </p:nvSpPr>
+        <p:spPr>
+          <a:xfrm>
+            <a:off x="457200" y="274320"/>
+            <a:ext cx="8229600" cy="640080"/>
+          </a:xfrm>
+          <a:prstGeom prst="rect">
+            <a:avLst/>
+          </a:prstGeom>
+          <a:noFill/>
+        </p:spPr>
+        <p:txBody>
+          <a:bodyPr wrap="square">
+            <a:spAutoFit/>
+          </a:bodyPr>
+          <a:lstStyle/>
+          <a:p>
+            <a:r>
+              <a:rPr sz="2200" b="1">
+                <a:solidFill>
+                  <a:srgbClr val="0B3D2E"/>
+                </a:solidFill>
+              </a:rPr>
+              <a:t>Diagrama de la clase</a:t>
+            </a:r>
+          </a:p>
+        </p:txBody>
+      </p:sp>
+      <p:pic>
+        <p:nvPicPr>
+          <p:cNvPr id="3" name="Picture 2" descr="5f3fbbfb423fc2f2.png"/>
+          <p:cNvPicPr>
+            <a:picLocks noChangeAspect="1"/>
+          </p:cNvPicPr>
+          <p:nvPr/>
+        </p:nvPicPr>
+        <p:blipFill>
+          <a:blip r:embed="rId2"/>
+          <a:stretch>
+            <a:fillRect/>
+          </a:stretch>
+        </p:blipFill>
+        <p:spPr>
+          <a:xfrm>
+            <a:off x="457200" y="3316554"/>
+            <a:ext cx="8229600" cy="864972"/>
+          </a:xfrm>
+          <a:prstGeom prst="rect">
+            <a:avLst/>
+          </a:prstGeom>
+        </p:spPr>
+      </p:pic>
     </p:spTree>
   </p:cSld>
   <p:clrMapOvr>
@@ -4107,7 +4648,7 @@
                   <a:srgbClr val="0B3D2E"/>
                 </a:solidFill>
               </a:rPr>
-              <a:t>📖 Definiciones y características</a:t>
+              <a:t>🧠 Explicación en profundidad</a:t>
             </a:r>
           </a:p>
         </p:txBody>
@@ -4145,97 +4686,37 @@
                   <a:srgbClr val="22282E"/>
                 </a:solidFill>
               </a:rPr>
-              <a:t>•  Prompt injection</a:t>
-            </a:r>
-          </a:p>
-          <a:p>
-            <a:pPr>
-              <a:spcAft>
-                <a:spcPts val="600"/>
-              </a:spcAft>
-            </a:pPr>
-            <a:r>
-              <a:rPr sz="1500">
-                <a:solidFill>
-                  <a:srgbClr val="22282E"/>
-                </a:solidFill>
-              </a:rPr>
-              <a:t>•  Instrucciones maliciosas ocultas en datos que el agente procesa (una web, un banner) que intentan cambiar su comportamiento. Riesgo LLM01 de OWASP.</a:t>
-            </a:r>
-          </a:p>
-          <a:p>
-            <a:pPr>
-              <a:spcAft>
-                <a:spcPts val="600"/>
-              </a:spcAft>
-            </a:pPr>
-            <a:r>
-              <a:rPr sz="1500">
-                <a:solidFill>
-                  <a:srgbClr val="22282E"/>
-                </a:solidFill>
-              </a:rPr>
-              <a:t>•  Exceso de agencia (excessive agency)</a:t>
-            </a:r>
-          </a:p>
-          <a:p>
-            <a:pPr>
-              <a:spcAft>
-                <a:spcPts val="600"/>
-              </a:spcAft>
-            </a:pPr>
-            <a:r>
-              <a:rPr sz="1500">
-                <a:solidFill>
-                  <a:srgbClr val="22282E"/>
-                </a:solidFill>
-              </a:rPr>
-              <a:t>•  Dar al agente más permisos/autonomía de la necesaria, de modo que un error o una inyección cause daño real. Riesgo LLM06.</a:t>
-            </a:r>
-          </a:p>
-          <a:p>
-            <a:pPr>
-              <a:spcAft>
-                <a:spcPts val="600"/>
-              </a:spcAft>
-            </a:pPr>
-            <a:r>
-              <a:rPr sz="1500">
-                <a:solidFill>
-                  <a:srgbClr val="22282E"/>
-                </a:solidFill>
-              </a:rPr>
-              <a:t>•  Guardrail</a:t>
-            </a:r>
-          </a:p>
-          <a:p>
-            <a:pPr>
-              <a:spcAft>
-                <a:spcPts val="600"/>
-              </a:spcAft>
-            </a:pPr>
-            <a:r>
-              <a:rPr sz="1500">
-                <a:solidFill>
-                  <a:srgbClr val="22282E"/>
-                </a:solidFill>
-              </a:rPr>
-              <a:t>•  Control que limita lo que el agente puede hacer (permisos mínimos, aprobación humana, listas de alcance, aislamiento de red).</a:t>
-            </a:r>
-          </a:p>
-          <a:p>
-            <a:pPr>
-              <a:spcAft>
-                <a:spcPts val="600"/>
-              </a:spcAft>
-            </a:pPr>
-            <a:r>
-              <a:rPr sz="1500">
-                <a:solidFill>
-                  <a:srgbClr val="22282E"/>
-                </a:solidFill>
-              </a:rPr>
-              <a:t>•  OPSEC (seguridad operativa)</a:t>
+              <a:t>•  Los guardrails son capas falibles: política, permisos, aislamiento, aprobación, límites, logging y respuesta. Una negativa del modelo no es frontera; una herramienta sin privilegio sí reduce…</a:t>
+            </a:r>
+          </a:p>
+          <a:p>
+            <a:pPr>
+              <a:spcAft>
+                <a:spcPts val="600"/>
+              </a:spcAft>
+            </a:pPr>
+            <a:r>
+              <a:rPr sz="1500">
+                <a:solidFill>
+                  <a:srgbClr val="22282E"/>
+                </a:solidFill>
+              </a:rPr>
+              <a:t>•  El diagrama separa lenguaje de autoridad. El modelo puede proponer; la política determina si la operación pertenece al alcance; la herramienta produce evidencia; y una persona o control determinista…</a:t>
+            </a:r>
+          </a:p>
+          <a:p>
+            <a:pPr>
+              <a:spcAft>
+                <a:spcPts val="600"/>
+              </a:spcAft>
+            </a:pPr>
+            <a:r>
+              <a:rPr sz="1500">
+                <a:solidFill>
+                  <a:srgbClr val="22282E"/>
+                </a:solidFill>
+              </a:rPr>
+              <a:t>•  Una inyección logra que el modelo solicite un secreto, pero el broker no expone variables y registra el intento.</a:t>
             </a:r>
           </a:p>
         </p:txBody>
@@ -4286,7 +4767,7 @@
                   <a:srgbClr val="0B3D2E"/>
                 </a:solidFill>
               </a:rPr>
-              <a:t>🧰 Herramientas y preparación</a:t>
+              <a:t>📔 Glosario operativo</a:t>
             </a:r>
           </a:p>
         </p:txBody>
@@ -4324,22 +4805,52 @@
                   <a:srgbClr val="22282E"/>
                 </a:solidFill>
               </a:rPr>
-              <a:t>•  Tu propio flujo de IA (de las clases anteriores). El ejercicio es de diseño de controles:</a:t>
-            </a:r>
-          </a:p>
-          <a:p>
-            <a:pPr>
-              <a:spcAft>
-                <a:spcPts val="600"/>
-              </a:spcAft>
-            </a:pPr>
-            <a:r>
-              <a:rPr sz="1500">
-                <a:solidFill>
-                  <a:srgbClr val="22282E"/>
-                </a:solidFill>
-              </a:rPr>
-              <a:t>•  políticas, permisos y registro. Revisa OWASP Top 10 for LLM como referencia.</a:t>
+              <a:t>•  Término — Definición</a:t>
+            </a:r>
+          </a:p>
+          <a:p>
+            <a:pPr>
+              <a:spcAft>
+                <a:spcPts val="600"/>
+              </a:spcAft>
+            </a:pPr>
+            <a:r>
+              <a:rPr sz="1500">
+                <a:solidFill>
+                  <a:srgbClr val="22282E"/>
+                </a:solidFill>
+              </a:rPr>
+              <a:t>•  Fail closed — Comportamiento que niega la operación cuando falta validación.</a:t>
+            </a:r>
+          </a:p>
+          <a:p>
+            <a:pPr>
+              <a:spcAft>
+                <a:spcPts val="600"/>
+              </a:spcAft>
+            </a:pPr>
+            <a:r>
+              <a:rPr sz="1500">
+                <a:solidFill>
+                  <a:srgbClr val="22282E"/>
+                </a:solidFill>
+              </a:rPr>
+              <a:t>•  Guardrail — Capa que reduce una capacidad o detecta su uso; no garantía absoluta.</a:t>
+            </a:r>
+          </a:p>
+          <a:p>
+            <a:pPr>
+              <a:spcAft>
+                <a:spcPts val="600"/>
+              </a:spcAft>
+            </a:pPr>
+            <a:r>
+              <a:rPr sz="1500">
+                <a:solidFill>
+                  <a:srgbClr val="22282E"/>
+                </a:solidFill>
+              </a:rPr>
+              <a:t>•  Audit trail — Registro ordenado de solicitudes, decisiones, ejecuciones y resultados.</a:t>
             </a:r>
           </a:p>
         </p:txBody>
@@ -4390,7 +4901,7 @@
                   <a:srgbClr val="0B3D2E"/>
                 </a:solidFill>
               </a:rPr>
-              <a:t>🧪 Laboratorio guiado (diseño de guardrails)</a:t>
+              <a:t>✅ Criterio de dominio</a:t>
             </a:r>
           </a:p>
         </p:txBody>
@@ -4428,82 +4939,7 @@
                   <a:srgbClr val="22282E"/>
                 </a:solidFill>
               </a:rPr>
-              <a:t>•  Modelo de amenazas del agente. Enumera cómo podrían atacar tu agente (inyección desde un banner, fuga de credenciales del contexto, acción fuera de alcance).</a:t>
-            </a:r>
-          </a:p>
-          <a:p>
-            <a:pPr>
-              <a:spcAft>
-                <a:spcPts val="600"/>
-              </a:spcAft>
-            </a:pPr>
-            <a:r>
-              <a:rPr sz="1500">
-                <a:solidFill>
-                  <a:srgbClr val="22282E"/>
-                </a:solidFill>
-              </a:rPr>
-              <a:t>•  Matriz de permisos. Clasifica sus herramientas en auto / aprobación / prohibido y justifica.</a:t>
-            </a:r>
-          </a:p>
-          <a:p>
-            <a:pPr>
-              <a:spcAft>
-                <a:spcPts val="600"/>
-              </a:spcAft>
-            </a:pPr>
-            <a:r>
-              <a:rPr sz="1500">
-                <a:solidFill>
-                  <a:srgbClr val="22282E"/>
-                </a:solidFill>
-              </a:rPr>
-              <a:t>•  Aislamiento. Define la red y los datos a los que el agente no debe acceder.</a:t>
-            </a:r>
-          </a:p>
-          <a:p>
-            <a:pPr>
-              <a:spcAft>
-                <a:spcPts val="600"/>
-              </a:spcAft>
-            </a:pPr>
-            <a:r>
-              <a:rPr sz="1500">
-                <a:solidFill>
-                  <a:srgbClr val="22282E"/>
-                </a:solidFill>
-              </a:rPr>
-              <a:t>•  Registro. Diseña el log de auditoría: qué campos guardas por cada acción.</a:t>
-            </a:r>
-          </a:p>
-          <a:p>
-            <a:pPr>
-              <a:spcAft>
-                <a:spcPts val="600"/>
-              </a:spcAft>
-            </a:pPr>
-            <a:r>
-              <a:rPr sz="1500">
-                <a:solidFill>
-                  <a:srgbClr val="22282E"/>
-                </a:solidFill>
-              </a:rPr>
-              <a:t>•  Política de datos. Escribe qué datos jamás entran a un modelo externo y por qué.</a:t>
-            </a:r>
-          </a:p>
-          <a:p>
-            <a:pPr>
-              <a:spcAft>
-                <a:spcPts val="600"/>
-              </a:spcAft>
-            </a:pPr>
-            <a:r>
-              <a:rPr sz="1500">
-                <a:solidFill>
-                  <a:srgbClr val="22282E"/>
-                </a:solidFill>
-              </a:rPr>
-              <a:t>•  Checklist legal. Redacta el mínimo legal antes de una sesión (autorización, alcance, ventana).</a:t>
+              <a:t>•  El alumno demuestra dominio cuando reproduce el flujo completo, puede atribuir cada acción, evita que texto no confiable otorgue autoridad y explica qué control contiene un fallo del modelo.</a:t>
             </a:r>
           </a:p>
         </p:txBody>
@@ -4554,7 +4990,7 @@
                   <a:srgbClr val="0B3D2E"/>
                 </a:solidFill>
               </a:rPr>
-              <a:t>✍️ Ejercicios</a:t>
+              <a:t>📖 Definiciones y características</a:t>
             </a:r>
           </a:p>
         </p:txBody>
@@ -4592,67 +5028,97 @@
                   <a:srgbClr val="22282E"/>
                 </a:solidFill>
               </a:rPr>
-              <a:t>•  Da un ejemplo concreto de prompt injection contra un agente de pentest y su mitigación.</a:t>
-            </a:r>
-          </a:p>
-          <a:p>
-            <a:pPr>
-              <a:spcAft>
-                <a:spcPts val="600"/>
-              </a:spcAft>
-            </a:pPr>
-            <a:r>
-              <a:rPr sz="1500">
-                <a:solidFill>
-                  <a:srgbClr val="22282E"/>
-                </a:solidFill>
-              </a:rPr>
-              <a:t>•  ¿Qué es exceso de agencia y cómo lo limitas?</a:t>
-            </a:r>
-          </a:p>
-          <a:p>
-            <a:pPr>
-              <a:spcAft>
-                <a:spcPts val="600"/>
-              </a:spcAft>
-            </a:pPr>
-            <a:r>
-              <a:rPr sz="1500">
-                <a:solidFill>
-                  <a:srgbClr val="22282E"/>
-                </a:solidFill>
-              </a:rPr>
-              <a:t>•  Diseña 3 campos imprescindibles de un log de auditoría del agente.</a:t>
-            </a:r>
-          </a:p>
-          <a:p>
-            <a:pPr>
-              <a:spcAft>
-                <a:spcPts val="600"/>
-              </a:spcAft>
-            </a:pPr>
-            <a:r>
-              <a:rPr sz="1500">
-                <a:solidFill>
-                  <a:srgbClr val="22282E"/>
-                </a:solidFill>
-              </a:rPr>
-              <a:t>•  ¿Cuándo usarías un modelo local en vez de uno en la nube?</a:t>
-            </a:r>
-          </a:p>
-          <a:p>
-            <a:pPr>
-              <a:spcAft>
-                <a:spcPts val="600"/>
-              </a:spcAft>
-            </a:pPr>
-            <a:r>
-              <a:rPr sz="1500">
-                <a:solidFill>
-                  <a:srgbClr val="22282E"/>
-                </a:solidFill>
-              </a:rPr>
-              <a:t>•  Explica por qué la IA no reduce tu responsabilidad legal.</a:t>
+              <a:t>•  Prompt injection</a:t>
+            </a:r>
+          </a:p>
+          <a:p>
+            <a:pPr>
+              <a:spcAft>
+                <a:spcPts val="600"/>
+              </a:spcAft>
+            </a:pPr>
+            <a:r>
+              <a:rPr sz="1500">
+                <a:solidFill>
+                  <a:srgbClr val="22282E"/>
+                </a:solidFill>
+              </a:rPr>
+              <a:t>•  Instrucciones maliciosas ocultas en datos que el agente procesa (una web, un banner) que intentan cambiar su comportamiento. Riesgo LLM01 de OWASP.</a:t>
+            </a:r>
+          </a:p>
+          <a:p>
+            <a:pPr>
+              <a:spcAft>
+                <a:spcPts val="600"/>
+              </a:spcAft>
+            </a:pPr>
+            <a:r>
+              <a:rPr sz="1500">
+                <a:solidFill>
+                  <a:srgbClr val="22282E"/>
+                </a:solidFill>
+              </a:rPr>
+              <a:t>•  Exceso de agencia (excessive agency)</a:t>
+            </a:r>
+          </a:p>
+          <a:p>
+            <a:pPr>
+              <a:spcAft>
+                <a:spcPts val="600"/>
+              </a:spcAft>
+            </a:pPr>
+            <a:r>
+              <a:rPr sz="1500">
+                <a:solidFill>
+                  <a:srgbClr val="22282E"/>
+                </a:solidFill>
+              </a:rPr>
+              <a:t>•  Dar al agente más permisos/autonomía de la necesaria, de modo que un error o una inyección cause daño real. Riesgo LLM06.</a:t>
+            </a:r>
+          </a:p>
+          <a:p>
+            <a:pPr>
+              <a:spcAft>
+                <a:spcPts val="600"/>
+              </a:spcAft>
+            </a:pPr>
+            <a:r>
+              <a:rPr sz="1500">
+                <a:solidFill>
+                  <a:srgbClr val="22282E"/>
+                </a:solidFill>
+              </a:rPr>
+              <a:t>•  Guardrail</a:t>
+            </a:r>
+          </a:p>
+          <a:p>
+            <a:pPr>
+              <a:spcAft>
+                <a:spcPts val="600"/>
+              </a:spcAft>
+            </a:pPr>
+            <a:r>
+              <a:rPr sz="1500">
+                <a:solidFill>
+                  <a:srgbClr val="22282E"/>
+                </a:solidFill>
+              </a:rPr>
+              <a:t>•  Control que limita lo que el agente puede hacer (permisos mínimos, aprobación humana, listas de alcance, aislamiento de red).</a:t>
+            </a:r>
+          </a:p>
+          <a:p>
+            <a:pPr>
+              <a:spcAft>
+                <a:spcPts val="600"/>
+              </a:spcAft>
+            </a:pPr>
+            <a:r>
+              <a:rPr sz="1500">
+                <a:solidFill>
+                  <a:srgbClr val="22282E"/>
+                </a:solidFill>
+              </a:rPr>
+              <a:t>•  OPSEC (seguridad operativa)</a:t>
             </a:r>
           </a:p>
         </p:txBody>
@@ -4703,7 +5169,7 @@
                   <a:srgbClr val="0B3D2E"/>
                 </a:solidFill>
               </a:rPr>
-              <a:t>📝 Reto verificable</a:t>
+              <a:t>🧰 Herramientas y preparación</a:t>
             </a:r>
           </a:p>
         </p:txBody>
@@ -4741,67 +5207,22 @@
                   <a:srgbClr val="22282E"/>
                 </a:solidFill>
               </a:rPr>
-              <a:t>•  Redacta un documento de guardrails para operar un agente de seguridad: matriz de permisos,</a:t>
-            </a:r>
-          </a:p>
-          <a:p>
-            <a:pPr>
-              <a:spcAft>
-                <a:spcPts val="600"/>
-              </a:spcAft>
-            </a:pPr>
-            <a:r>
-              <a:rPr sz="1500">
-                <a:solidFill>
-                  <a:srgbClr val="22282E"/>
-                </a:solidFill>
-              </a:rPr>
-              <a:t>•  aislamiento, política de datos, registro de auditoría y checklist legal.</a:t>
-            </a:r>
-          </a:p>
-          <a:p>
-            <a:pPr>
-              <a:spcAft>
-                <a:spcPts val="600"/>
-              </a:spcAft>
-            </a:pPr>
-            <a:r>
-              <a:rPr sz="1500">
-                <a:solidFill>
-                  <a:srgbClr val="22282E"/>
-                </a:solidFill>
-              </a:rPr>
-              <a:t>•  Criterio de aceptación: toda acción con impacto requiere aprobación humana; hay aislamiento</a:t>
-            </a:r>
-          </a:p>
-          <a:p>
-            <a:pPr>
-              <a:spcAft>
-                <a:spcPts val="600"/>
-              </a:spcAft>
-            </a:pPr>
-            <a:r>
-              <a:rPr sz="1500">
-                <a:solidFill>
-                  <a:srgbClr val="22282E"/>
-                </a:solidFill>
-              </a:rPr>
-              <a:t>•  de red; se define qué datos no salen al modelo; existe un registro auditable; se exige</a:t>
-            </a:r>
-          </a:p>
-          <a:p>
-            <a:pPr>
-              <a:spcAft>
-                <a:spcPts val="600"/>
-              </a:spcAft>
-            </a:pPr>
-            <a:r>
-              <a:rPr sz="1500">
-                <a:solidFill>
-                  <a:srgbClr val="22282E"/>
-                </a:solidFill>
-              </a:rPr>
-              <a:t>•  autorización por escrito antes de cualquier sesión.</a:t>
+              <a:t>•  Tu propio flujo de IA (de las clases anteriores). El ejercicio es de diseño de controles:</a:t>
+            </a:r>
+          </a:p>
+          <a:p>
+            <a:pPr>
+              <a:spcAft>
+                <a:spcPts val="600"/>
+              </a:spcAft>
+            </a:pPr>
+            <a:r>
+              <a:rPr sz="1500">
+                <a:solidFill>
+                  <a:srgbClr val="22282E"/>
+                </a:solidFill>
+              </a:rPr>
+              <a:t>•  políticas, permisos y registro. Revisa OWASP Top 10 for LLM como referencia.</a:t>
             </a:r>
           </a:p>
         </p:txBody>
